--- a/Wip_talk_19thMay.pptx
+++ b/Wip_talk_19thMay.pptx
@@ -6967,7 +6967,7 @@
             <a:blip>
               <a:extLst>
                 <a:ext uri="{96DAC541-7B7A-43D3-8B79-37D633B846F1}">
-                  <asvg:svgBlip xmlns:asvg="http://schemas.microsoft.com/office/drawing/2016/SVG/main" r:embed="rId4"/>
+                  <asvg:svgBlip xmlns:asvg="http://schemas.microsoft.com/office/drawing/2016/SVG/main" xmlns="" r:embed="rId4"/>
                 </a:ext>
               </a:extLst>
             </a:blip>
@@ -7090,7 +7090,7 @@
             <a:blip>
               <a:extLst>
                 <a:ext uri="{96DAC541-7B7A-43D3-8B79-37D633B846F1}">
-                  <asvg:svgBlip xmlns:asvg="http://schemas.microsoft.com/office/drawing/2016/SVG/main" r:embed="rId5"/>
+                  <asvg:svgBlip xmlns:asvg="http://schemas.microsoft.com/office/drawing/2016/SVG/main" xmlns="" r:embed="rId5"/>
                 </a:ext>
               </a:extLst>
             </a:blip>
@@ -7198,7 +7198,7 @@
             <a:blip>
               <a:extLst>
                 <a:ext uri="{96DAC541-7B7A-43D3-8B79-37D633B846F1}">
-                  <asvg:svgBlip xmlns:asvg="http://schemas.microsoft.com/office/drawing/2016/SVG/main" r:embed="rId6"/>
+                  <asvg:svgBlip xmlns:asvg="http://schemas.microsoft.com/office/drawing/2016/SVG/main" xmlns="" r:embed="rId6"/>
                 </a:ext>
               </a:extLst>
             </a:blip>
@@ -7310,7 +7310,7 @@
             <a:blip>
               <a:extLst>
                 <a:ext uri="{96DAC541-7B7A-43D3-8B79-37D633B846F1}">
-                  <asvg:svgBlip xmlns:asvg="http://schemas.microsoft.com/office/drawing/2016/SVG/main" r:embed="rId7"/>
+                  <asvg:svgBlip xmlns:asvg="http://schemas.microsoft.com/office/drawing/2016/SVG/main" xmlns="" r:embed="rId7"/>
                 </a:ext>
               </a:extLst>
             </a:blip>
@@ -7466,7 +7466,7 @@
             <a:blip>
               <a:extLst>
                 <a:ext uri="{96DAC541-7B7A-43D3-8B79-37D633B846F1}">
-                  <asvg:svgBlip xmlns:asvg="http://schemas.microsoft.com/office/drawing/2016/SVG/main" r:embed="rId8"/>
+                  <asvg:svgBlip xmlns:asvg="http://schemas.microsoft.com/office/drawing/2016/SVG/main" xmlns="" r:embed="rId8"/>
                 </a:ext>
               </a:extLst>
             </a:blip>
